--- a/engine/templates/vertical/base.pptx
+++ b/engine/templates/vertical/base.pptx
@@ -765,7 +765,7 @@
     </p:spTree>
     <p:extLst>
       <p:ext uri="{BB962C8B-B14F-4D97-AF65-F5344CB8AC3E}">
-        <p14:creationId xmlns:p14="http://schemas.microsoft.com/office/powerpoint/2010/main" val="4287507725"/>
+        <p14:creationId xmlns:p14="http://schemas.microsoft.com/office/powerpoint/2010/main" val="3172397697"/>
       </p:ext>
     </p:extLst>
   </p:cSld>
@@ -795,7 +795,7 @@
     </p:spTree>
     <p:extLst>
       <p:ext uri="{BB962C8B-B14F-4D97-AF65-F5344CB8AC3E}">
-        <p14:creationId xmlns:p14="http://schemas.microsoft.com/office/powerpoint/2010/main" val="2432348708"/>
+        <p14:creationId xmlns:p14="http://schemas.microsoft.com/office/powerpoint/2010/main" val="2231014574"/>
       </p:ext>
     </p:extLst>
   </p:cSld>
@@ -913,7 +913,7 @@
     </p:spTree>
     <p:extLst>
       <p:ext uri="{BB962C8B-B14F-4D97-AF65-F5344CB8AC3E}">
-        <p14:creationId xmlns:p14="http://schemas.microsoft.com/office/powerpoint/2010/main" val="965774483"/>
+        <p14:creationId xmlns:p14="http://schemas.microsoft.com/office/powerpoint/2010/main" val="1994619184"/>
       </p:ext>
     </p:extLst>
   </p:cSld>
@@ -1031,7 +1031,7 @@
     </p:spTree>
     <p:extLst>
       <p:ext uri="{BB962C8B-B14F-4D97-AF65-F5344CB8AC3E}">
-        <p14:creationId xmlns:p14="http://schemas.microsoft.com/office/powerpoint/2010/main" val="1290685654"/>
+        <p14:creationId xmlns:p14="http://schemas.microsoft.com/office/powerpoint/2010/main" val="154500421"/>
       </p:ext>
     </p:extLst>
   </p:cSld>
@@ -1149,7 +1149,7 @@
     </p:spTree>
     <p:extLst>
       <p:ext uri="{BB962C8B-B14F-4D97-AF65-F5344CB8AC3E}">
-        <p14:creationId xmlns:p14="http://schemas.microsoft.com/office/powerpoint/2010/main" val="1239088785"/>
+        <p14:creationId xmlns:p14="http://schemas.microsoft.com/office/powerpoint/2010/main" val="3270702322"/>
       </p:ext>
     </p:extLst>
   </p:cSld>
@@ -1267,7 +1267,7 @@
     </p:spTree>
     <p:extLst>
       <p:ext uri="{BB962C8B-B14F-4D97-AF65-F5344CB8AC3E}">
-        <p14:creationId xmlns:p14="http://schemas.microsoft.com/office/powerpoint/2010/main" val="23198839"/>
+        <p14:creationId xmlns:p14="http://schemas.microsoft.com/office/powerpoint/2010/main" val="418488395"/>
       </p:ext>
     </p:extLst>
   </p:cSld>
@@ -1385,7 +1385,7 @@
     </p:spTree>
     <p:extLst>
       <p:ext uri="{BB962C8B-B14F-4D97-AF65-F5344CB8AC3E}">
-        <p14:creationId xmlns:p14="http://schemas.microsoft.com/office/powerpoint/2010/main" val="3338702685"/>
+        <p14:creationId xmlns:p14="http://schemas.microsoft.com/office/powerpoint/2010/main" val="3679954604"/>
       </p:ext>
     </p:extLst>
   </p:cSld>
@@ -1503,7 +1503,7 @@
     </p:spTree>
     <p:extLst>
       <p:ext uri="{BB962C8B-B14F-4D97-AF65-F5344CB8AC3E}">
-        <p14:creationId xmlns:p14="http://schemas.microsoft.com/office/powerpoint/2010/main" val="706268409"/>
+        <p14:creationId xmlns:p14="http://schemas.microsoft.com/office/powerpoint/2010/main" val="3762314336"/>
       </p:ext>
     </p:extLst>
   </p:cSld>
@@ -1621,7 +1621,7 @@
     </p:spTree>
     <p:extLst>
       <p:ext uri="{BB962C8B-B14F-4D97-AF65-F5344CB8AC3E}">
-        <p14:creationId xmlns:p14="http://schemas.microsoft.com/office/powerpoint/2010/main" val="619331025"/>
+        <p14:creationId xmlns:p14="http://schemas.microsoft.com/office/powerpoint/2010/main" val="1413200968"/>
       </p:ext>
     </p:extLst>
   </p:cSld>
@@ -1744,7 +1744,7 @@
     </p:spTree>
     <p:extLst>
       <p:ext uri="{BB962C8B-B14F-4D97-AF65-F5344CB8AC3E}">
-        <p14:creationId xmlns:p14="http://schemas.microsoft.com/office/powerpoint/2010/main" val="398653934"/>
+        <p14:creationId xmlns:p14="http://schemas.microsoft.com/office/powerpoint/2010/main" val="1829804693"/>
       </p:ext>
     </p:extLst>
   </p:cSld>
@@ -2109,7 +2109,7 @@
     </p:spTree>
     <p:extLst>
       <p:ext uri="{BB962C8B-B14F-4D97-AF65-F5344CB8AC3E}">
-        <p14:creationId xmlns:p14="http://schemas.microsoft.com/office/powerpoint/2010/main" val="4100534832"/>
+        <p14:creationId xmlns:p14="http://schemas.microsoft.com/office/powerpoint/2010/main" val="2951654358"/>
       </p:ext>
     </p:extLst>
   </p:cSld>
@@ -2227,7 +2227,7 @@
     </p:spTree>
     <p:extLst>
       <p:ext uri="{BB962C8B-B14F-4D97-AF65-F5344CB8AC3E}">
-        <p14:creationId xmlns:p14="http://schemas.microsoft.com/office/powerpoint/2010/main" val="3376261550"/>
+        <p14:creationId xmlns:p14="http://schemas.microsoft.com/office/powerpoint/2010/main" val="2088614968"/>
       </p:ext>
     </p:extLst>
   </p:cSld>
@@ -2360,7 +2360,7 @@
     </p:spTree>
     <p:extLst>
       <p:ext uri="{BB962C8B-B14F-4D97-AF65-F5344CB8AC3E}">
-        <p14:creationId xmlns:p14="http://schemas.microsoft.com/office/powerpoint/2010/main" val="1506081930"/>
+        <p14:creationId xmlns:p14="http://schemas.microsoft.com/office/powerpoint/2010/main" val="4155478887"/>
       </p:ext>
     </p:extLst>
   </p:cSld>
@@ -2498,7 +2498,7 @@
     </p:spTree>
     <p:extLst>
       <p:ext uri="{BB962C8B-B14F-4D97-AF65-F5344CB8AC3E}">
-        <p14:creationId xmlns:p14="http://schemas.microsoft.com/office/powerpoint/2010/main" val="928470150"/>
+        <p14:creationId xmlns:p14="http://schemas.microsoft.com/office/powerpoint/2010/main" val="2714027035"/>
       </p:ext>
     </p:extLst>
   </p:cSld>
@@ -2631,7 +2631,7 @@
     </p:spTree>
     <p:extLst>
       <p:ext uri="{BB962C8B-B14F-4D97-AF65-F5344CB8AC3E}">
-        <p14:creationId xmlns:p14="http://schemas.microsoft.com/office/powerpoint/2010/main" val="3101088569"/>
+        <p14:creationId xmlns:p14="http://schemas.microsoft.com/office/powerpoint/2010/main" val="3829706624"/>
       </p:ext>
     </p:extLst>
   </p:cSld>
@@ -2764,7 +2764,7 @@
     </p:spTree>
     <p:extLst>
       <p:ext uri="{BB962C8B-B14F-4D97-AF65-F5344CB8AC3E}">
-        <p14:creationId xmlns:p14="http://schemas.microsoft.com/office/powerpoint/2010/main" val="209707944"/>
+        <p14:creationId xmlns:p14="http://schemas.microsoft.com/office/powerpoint/2010/main" val="3124558706"/>
       </p:ext>
     </p:extLst>
   </p:cSld>
@@ -2897,7 +2897,7 @@
     </p:spTree>
     <p:extLst>
       <p:ext uri="{BB962C8B-B14F-4D97-AF65-F5344CB8AC3E}">
-        <p14:creationId xmlns:p14="http://schemas.microsoft.com/office/powerpoint/2010/main" val="1933243703"/>
+        <p14:creationId xmlns:p14="http://schemas.microsoft.com/office/powerpoint/2010/main" val="1172723290"/>
       </p:ext>
     </p:extLst>
   </p:cSld>
@@ -3030,7 +3030,7 @@
     </p:spTree>
     <p:extLst>
       <p:ext uri="{BB962C8B-B14F-4D97-AF65-F5344CB8AC3E}">
-        <p14:creationId xmlns:p14="http://schemas.microsoft.com/office/powerpoint/2010/main" val="4246066705"/>
+        <p14:creationId xmlns:p14="http://schemas.microsoft.com/office/powerpoint/2010/main" val="1285902372"/>
       </p:ext>
     </p:extLst>
   </p:cSld>
@@ -3163,7 +3163,7 @@
     </p:spTree>
     <p:extLst>
       <p:ext uri="{BB962C8B-B14F-4D97-AF65-F5344CB8AC3E}">
-        <p14:creationId xmlns:p14="http://schemas.microsoft.com/office/powerpoint/2010/main" val="846530618"/>
+        <p14:creationId xmlns:p14="http://schemas.microsoft.com/office/powerpoint/2010/main" val="1579022137"/>
       </p:ext>
     </p:extLst>
   </p:cSld>
@@ -3296,7 +3296,7 @@
     </p:spTree>
     <p:extLst>
       <p:ext uri="{BB962C8B-B14F-4D97-AF65-F5344CB8AC3E}">
-        <p14:creationId xmlns:p14="http://schemas.microsoft.com/office/powerpoint/2010/main" val="2021116637"/>
+        <p14:creationId xmlns:p14="http://schemas.microsoft.com/office/powerpoint/2010/main" val="3053526649"/>
       </p:ext>
     </p:extLst>
   </p:cSld>
@@ -3671,7 +3671,7 @@
     </p:spTree>
     <p:extLst>
       <p:ext uri="{BB962C8B-B14F-4D97-AF65-F5344CB8AC3E}">
-        <p14:creationId xmlns:p14="http://schemas.microsoft.com/office/powerpoint/2010/main" val="2275585159"/>
+        <p14:creationId xmlns:p14="http://schemas.microsoft.com/office/powerpoint/2010/main" val="1255139297"/>
       </p:ext>
     </p:extLst>
   </p:cSld>
@@ -5868,7 +5868,7 @@
     </p:spTree>
     <p:extLst>
       <p:ext uri="{BB962C8B-B14F-4D97-AF65-F5344CB8AC3E}">
-        <p14:creationId xmlns:p14="http://schemas.microsoft.com/office/powerpoint/2010/main" val="913145102"/>
+        <p14:creationId xmlns:p14="http://schemas.microsoft.com/office/powerpoint/2010/main" val="262102588"/>
       </p:ext>
     </p:extLst>
   </p:cSld>
@@ -6706,7 +6706,7 @@
     </p:spTree>
     <p:extLst>
       <p:ext uri="{BB962C8B-B14F-4D97-AF65-F5344CB8AC3E}">
-        <p14:creationId xmlns:p14="http://schemas.microsoft.com/office/powerpoint/2010/main" val="1148207863"/>
+        <p14:creationId xmlns:p14="http://schemas.microsoft.com/office/powerpoint/2010/main" val="626302256"/>
       </p:ext>
     </p:extLst>
   </p:cSld>
@@ -7666,7 +7666,7 @@
     </p:spTree>
     <p:extLst>
       <p:ext uri="{BB962C8B-B14F-4D97-AF65-F5344CB8AC3E}">
-        <p14:creationId xmlns:p14="http://schemas.microsoft.com/office/powerpoint/2010/main" val="2635140100"/>
+        <p14:creationId xmlns:p14="http://schemas.microsoft.com/office/powerpoint/2010/main" val="3261760654"/>
       </p:ext>
     </p:extLst>
   </p:cSld>
@@ -8251,7 +8251,7 @@
                   <a:ea typeface="a시월구일3"/>
                   <a:sym typeface="Samsung InterFace" charset="0"/>
                 </a:rPr>
-                <a:t>구현 방안</a:t>
+                <a:t>견본 글</a:t>
               </a:r>
             </a:p>
           </p:txBody>
@@ -8438,7 +8438,7 @@
                 <a:ea typeface="a시월구일2"/>
                 <a:sym typeface="Wingdings" pitchFamily="2" charset="2"/>
               </a:rPr>
-              <a:t>대상 시스템별 기능을 공통·개별로 나누고 화면 표준과 통합인증(SSO)을 먼저 적용함</a:t>
+              <a:t>견본 글</a:t>
             </a:r>
             <a:endParaRPr lang="en-US" altLang="ko-KR" sz="900" dirty="0">
               <a:solidFill>
@@ -8468,7 +8468,7 @@
                 <a:ea typeface="a시월구일2"/>
                 <a:sym typeface="Wingdings" pitchFamily="2" charset="2"/>
               </a:rPr>
-              <a:t>단계별로 이관하여 서비스 중단 없이 식품안전나라로 전환함</a:t>
+              <a:t>견본 글</a:t>
             </a:r>
             <a:endParaRPr lang="en-US" altLang="ko-KR" sz="900" dirty="0">
               <a:solidFill>
@@ -8532,7 +8532,7 @@
                 <a:latin typeface="G마켓 산스 TTF Bold"/>
                 <a:ea typeface="G마켓 산스 TTF Bold"/>
               </a:rPr>
-              <a:t>1.1 식품안전나라 통합 플랫폼</a:t>
+              <a:t>1.1 견본 글</a:t>
             </a:r>
             <a:endParaRPr lang="en-US" altLang="ko-KR" sz="2400" spc="-100" dirty="0">
               <a:solidFill>
@@ -8595,7 +8595,7 @@
                 <a:latin typeface="a시월구일2"/>
                 <a:ea typeface="a시월구일2"/>
               </a:rPr>
-              <a:t>1. 기능 요구사항</a:t>
+              <a:t>1. 견본 글</a:t>
             </a:r>
           </a:p>
         </p:txBody>
@@ -8666,7 +8666,7 @@
                 <a:latin typeface="a시월구일3"/>
                 <a:ea typeface="a시월구일3"/>
               </a:rPr>
-              <a:t>16종 시스템을 식품안전나라로 흡수 통폐합하고 공통 기능을 공용화합니다.</a:t>
+              <a:t>16견본 글</a:t>
             </a:r>
             <a:br>
               <a:rPr lang="ko-KR" altLang="en-US" sz="1100" spc="-50" dirty="0">
@@ -8685,7 +8685,7 @@
                 <a:latin typeface="a시월구일3"/>
                 <a:ea typeface="a시월구일3"/>
               </a:rPr>
-              <a:t>국민이 한곳에서 식품안전 정보와 민원을 처리하도록 구현합니다.</a:t>
+              <a:t>견본 글</a:t>
             </a:r>
             <a:endParaRPr lang="en-US" altLang="ko-KR" sz="1100" spc="-50" dirty="0">
               <a:solidFill>
@@ -9058,7 +9058,7 @@
                 <a:latin typeface="a시월구일4"/>
                 <a:ea typeface="a시월구일4"/>
               </a:rPr>
-              <a:t>16종 흡수 통폐합 · 공통기능 공용화 · 통합 화면 표준</a:t>
+              <a:t>16견본 글</a:t>
             </a:r>
             <a:endParaRPr lang="ko-KR" altLang="ko-KR" sz="1300" dirty="0">
               <a:solidFill>
@@ -9132,7 +9132,7 @@
                 <a:latin typeface="a시월구일3"/>
                 <a:ea typeface="a시월구일3"/>
               </a:rPr>
-              <a:t>통합 대상과 단계별 이관</a:t>
+              <a:t>견본 글</a:t>
             </a:r>
             <a:endParaRPr lang="en-US" altLang="ko-KR" sz="1200" spc="-50" dirty="0">
               <a:solidFill>
@@ -9301,7 +9301,7 @@
                 <a:ea typeface="a시월구일3"/>
                 <a:sym typeface="Samsung InterFace" charset="0"/>
               </a:rPr>
-              <a:t>통합 대상 시스템 현황</a:t>
+              <a:t>견본 글</a:t>
             </a:r>
             <a:endParaRPr lang="ko-KR" altLang="ko-KR" sz="1050" spc="-50" dirty="0">
               <a:latin typeface="a시월구일3"/>
@@ -9539,7 +9539,7 @@
                   <a:latin typeface="G마켓 산스 TTF Bold" panose="02000000000000000000" pitchFamily="2" charset="-127"/>
                   <a:ea typeface="G마켓 산스 TTF Bold" panose="02000000000000000000" pitchFamily="2" charset="-127"/>
                 </a:rPr>
-                <a:t>○○기관 차세대</a:t>
+                <a:t>○○견본 글</a:t>
               </a:r>
               <a:endParaRPr lang="en-US" altLang="ko-KR" sz="3200" spc="-300" dirty="0">
                 <a:solidFill>
@@ -9563,7 +9563,7 @@
                   <a:latin typeface="G마켓 산스 TTF Bold" panose="02000000000000000000" pitchFamily="2" charset="-127"/>
                   <a:ea typeface="G마켓 산스 TTF Bold" panose="02000000000000000000" pitchFamily="2" charset="-127"/>
                 </a:rPr>
-                <a:t>정보시스템 구축 사업</a:t>
+                <a:t>견본 글</a:t>
               </a:r>
               <a:endParaRPr lang="ko-KR" altLang="en-US" sz="4200" spc="-300" dirty="0">
                 <a:solidFill>
@@ -9615,7 +9615,7 @@
                   <a:latin typeface="a시월구일3" panose="02020600000000000000" pitchFamily="18" charset="-127"/>
                   <a:ea typeface="a시월구일3" panose="02020600000000000000" pitchFamily="18" charset="-127"/>
                 </a:rPr>
-                <a:t>년</a:t>
+                <a:t>견본</a:t>
               </a:r>
             </a:p>
           </p:txBody>
@@ -9650,7 +9650,7 @@
                   <a:latin typeface="a시월구일2" panose="02020600000000000000" pitchFamily="18" charset="-127"/>
                   <a:ea typeface="a시월구일2" panose="02020600000000000000" pitchFamily="18" charset="-127"/>
                 </a:rPr>
-                <a:t>기술제안서</a:t>
+                <a:t>견본 글</a:t>
               </a:r>
             </a:p>
           </p:txBody>
@@ -10260,7 +10260,7 @@
                 <a:latin typeface="a시월구일3" panose="02020600000000000000" pitchFamily="18" charset="-127"/>
                 <a:ea typeface="a시월구일3" panose="02020600000000000000" pitchFamily="18" charset="-127"/>
               </a:rPr>
-              <a:t>사업이해도</a:t>
+              <a:t>견본 글</a:t>
             </a:r>
           </a:p>
           <a:p>
@@ -10306,7 +10306,7 @@
                 <a:latin typeface="a시월구일2" panose="02020600000000000000" pitchFamily="18" charset="-127"/>
                 <a:ea typeface="a시월구일2" panose="02020600000000000000" pitchFamily="18" charset="-127"/>
               </a:rPr>
-              <a:t>사업 배경 및 목적</a:t>
+              <a:t>견본 글</a:t>
             </a:r>
           </a:p>
           <a:p>
@@ -10352,7 +10352,7 @@
                 <a:latin typeface="a시월구일2" panose="02020600000000000000" pitchFamily="18" charset="-127"/>
                 <a:ea typeface="a시월구일2" panose="02020600000000000000" pitchFamily="18" charset="-127"/>
               </a:rPr>
-              <a:t>현황 및 문제점</a:t>
+              <a:t>견본 글</a:t>
             </a:r>
           </a:p>
           <a:p>
@@ -10398,7 +10398,7 @@
                 <a:latin typeface="a시월구일2" panose="02020600000000000000" pitchFamily="18" charset="-127"/>
                 <a:ea typeface="a시월구일2" panose="02020600000000000000" pitchFamily="18" charset="-127"/>
               </a:rPr>
-              <a:t>1차 사업 범위(국민·산업·정부·인프라)</a:t>
+              <a:t>1견본 글</a:t>
             </a:r>
           </a:p>
           <a:p>
@@ -10444,7 +10444,7 @@
                 <a:latin typeface="a시월구일2" panose="02020600000000000000" pitchFamily="18" charset="-127"/>
                 <a:ea typeface="a시월구일2" panose="02020600000000000000" pitchFamily="18" charset="-127"/>
               </a:rPr>
-              <a:t>목표시스템 구성도</a:t>
+              <a:t>견본 글</a:t>
             </a:r>
           </a:p>
           <a:p>
@@ -10490,7 +10490,7 @@
                 <a:latin typeface="a시월구일2" panose="02020600000000000000" pitchFamily="18" charset="-127"/>
                 <a:ea typeface="a시월구일2" panose="02020600000000000000" pitchFamily="18" charset="-127"/>
               </a:rPr>
-              <a:t>전제조건</a:t>
+              <a:t>견본 글</a:t>
             </a:r>
           </a:p>
           <a:p>
@@ -10536,7 +10536,7 @@
                 <a:latin typeface="a시월구일2" panose="02020600000000000000" pitchFamily="18" charset="-127"/>
                 <a:ea typeface="a시월구일2" panose="02020600000000000000" pitchFamily="18" charset="-127"/>
               </a:rPr>
-              <a:t>제안의 특징 및 장점</a:t>
+              <a:t>견본 글</a:t>
             </a:r>
           </a:p>
           <a:p>
@@ -10586,7 +10586,7 @@
                 <a:latin typeface="a시월구일3" panose="02020600000000000000" pitchFamily="18" charset="-127"/>
                 <a:ea typeface="a시월구일3" panose="02020600000000000000" pitchFamily="18" charset="-127"/>
               </a:rPr>
-              <a:t>추진전략</a:t>
+              <a:t>견본 글</a:t>
             </a:r>
           </a:p>
           <a:p>
@@ -10632,7 +10632,7 @@
                 <a:latin typeface="a시월구일2" panose="02020600000000000000" pitchFamily="18" charset="-127"/>
                 <a:ea typeface="a시월구일2" panose="02020600000000000000" pitchFamily="18" charset="-127"/>
               </a:rPr>
-              <a:t>추진 목표 및 전략</a:t>
+              <a:t>견본 글</a:t>
             </a:r>
           </a:p>
           <a:p>
@@ -10678,7 +10678,7 @@
                 <a:latin typeface="a시월구일2" panose="02020600000000000000" pitchFamily="18" charset="-127"/>
                 <a:ea typeface="a시월구일2" panose="02020600000000000000" pitchFamily="18" charset="-127"/>
               </a:rPr>
-              <a:t>300일 4개 트랙 병행 전략</a:t>
+              <a:t>300견본 글</a:t>
             </a:r>
           </a:p>
           <a:p>
@@ -10724,7 +10724,7 @@
                 <a:latin typeface="a시월구일2" panose="02020600000000000000" pitchFamily="18" charset="-127"/>
                 <a:ea typeface="a시월구일2" panose="02020600000000000000" pitchFamily="18" charset="-127"/>
               </a:rPr>
-              <a:t>이해관계자·위험요소 대응</a:t>
+              <a:t>견본 글</a:t>
             </a:r>
           </a:p>
         </p:txBody>
@@ -12518,7 +12518,7 @@
                 <a:latin typeface="a시월구일2" panose="02020600000000000000" pitchFamily="18" charset="-127"/>
                 <a:ea typeface="a시월구일2" panose="02020600000000000000" pitchFamily="18" charset="-127"/>
               </a:rPr>
-              <a:t>1. 사업이해도</a:t>
+              <a:t>1. 견본 글</a:t>
             </a:r>
           </a:p>
           <a:p>
@@ -12549,7 +12549,7 @@
                 <a:latin typeface="a시월구일2" panose="02020600000000000000" pitchFamily="18" charset="-127"/>
                 <a:ea typeface="a시월구일2" panose="02020600000000000000" pitchFamily="18" charset="-127"/>
               </a:rPr>
-              <a:t>2. 추진전략</a:t>
+              <a:t>2. 견본 글</a:t>
             </a:r>
           </a:p>
           <a:p>
@@ -12580,7 +12580,7 @@
                 <a:latin typeface="a시월구일2" panose="02020600000000000000" pitchFamily="18" charset="-127"/>
                 <a:ea typeface="a시월구일2" panose="02020600000000000000" pitchFamily="18" charset="-127"/>
               </a:rPr>
-              <a:t>3. 추진체계</a:t>
+              <a:t>3. 견본 글</a:t>
             </a:r>
           </a:p>
           <a:p>
@@ -12611,7 +12611,7 @@
                 <a:latin typeface="a시월구일2" panose="02020600000000000000" pitchFamily="18" charset="-127"/>
                 <a:ea typeface="a시월구일2" panose="02020600000000000000" pitchFamily="18" charset="-127"/>
               </a:rPr>
-              <a:t>4. 사업추진 방법론</a:t>
+              <a:t>4. 견본 글</a:t>
             </a:r>
           </a:p>
         </p:txBody>
@@ -12630,7 +12630,7 @@
     <mc:Choice Requires="p14">
       <p:transition/>
     </mc:Choice>
-    <mc:Fallback xmlns="" xmlns:c="http://schemas.openxmlformats.org/drawingml/2006/chart" xmlns:dgm="http://schemas.openxmlformats.org/drawingml/2006/diagram" xmlns:dsp="http://schemas.microsoft.com/office/drawing/2008/diagram">
+    <mc:Fallback xmlns:dsp="http://schemas.microsoft.com/office/drawing/2008/diagram" xmlns:dgm="http://schemas.openxmlformats.org/drawingml/2006/diagram" xmlns:c="http://schemas.openxmlformats.org/drawingml/2006/chart" xmlns="">
       <p:transition/>
     </mc:Fallback>
   </mc:AlternateContent>
